--- a/星空ガイドビュー.pptx
+++ b/星空ガイドビュー.pptx
@@ -9,6 +9,9 @@
     <p:sldId id="257" r:id="rId6"/>
     <p:sldId id="258" r:id="rId7"/>
     <p:sldId id="259" r:id="rId8"/>
+    <p:sldId id="260" r:id="rId9"/>
+    <p:sldId id="261" r:id="rId10"/>
+    <p:sldId id="262" r:id="rId11"/>
   </p:sldIdLst>
   <p:sldSz cx="12192000" cy="6858000"/>
   <p:notesSz cx="6858000" cy="9144000"/>
@@ -270,7 +273,7 @@
           <a:p>
             <a:fld id="{BCD03394-9BA9-47E9-9E8A-35AE17051D58}" type="datetimeFigureOut">
               <a:rPr kumimoji="1" lang="ja-JP" altLang="en-US" smtClean="0"/>
-              <a:t>2026/1/28</a:t>
+              <a:t>2026/5/13</a:t>
             </a:fld>
             <a:endParaRPr kumimoji="1" lang="ja-JP" altLang="en-US"/>
           </a:p>
@@ -500,7 +503,7 @@
           <a:p>
             <a:fld id="{BCD03394-9BA9-47E9-9E8A-35AE17051D58}" type="datetimeFigureOut">
               <a:rPr kumimoji="1" lang="ja-JP" altLang="en-US" smtClean="0"/>
-              <a:t>2026/1/28</a:t>
+              <a:t>2026/5/13</a:t>
             </a:fld>
             <a:endParaRPr kumimoji="1" lang="ja-JP" altLang="en-US"/>
           </a:p>
@@ -740,7 +743,7 @@
           <a:p>
             <a:fld id="{BCD03394-9BA9-47E9-9E8A-35AE17051D58}" type="datetimeFigureOut">
               <a:rPr kumimoji="1" lang="ja-JP" altLang="en-US" smtClean="0"/>
-              <a:t>2026/1/28</a:t>
+              <a:t>2026/5/13</a:t>
             </a:fld>
             <a:endParaRPr kumimoji="1" lang="ja-JP" altLang="en-US"/>
           </a:p>
@@ -970,7 +973,7 @@
           <a:p>
             <a:fld id="{BCD03394-9BA9-47E9-9E8A-35AE17051D58}" type="datetimeFigureOut">
               <a:rPr kumimoji="1" lang="ja-JP" altLang="en-US" smtClean="0"/>
-              <a:t>2026/1/28</a:t>
+              <a:t>2026/5/13</a:t>
             </a:fld>
             <a:endParaRPr kumimoji="1" lang="ja-JP" altLang="en-US"/>
           </a:p>
@@ -1245,7 +1248,7 @@
           <a:p>
             <a:fld id="{BCD03394-9BA9-47E9-9E8A-35AE17051D58}" type="datetimeFigureOut">
               <a:rPr kumimoji="1" lang="ja-JP" altLang="en-US" smtClean="0"/>
-              <a:t>2026/1/28</a:t>
+              <a:t>2026/5/13</a:t>
             </a:fld>
             <a:endParaRPr kumimoji="1" lang="ja-JP" altLang="en-US"/>
           </a:p>
@@ -1574,7 +1577,7 @@
           <a:p>
             <a:fld id="{BCD03394-9BA9-47E9-9E8A-35AE17051D58}" type="datetimeFigureOut">
               <a:rPr kumimoji="1" lang="ja-JP" altLang="en-US" smtClean="0"/>
-              <a:t>2026/1/28</a:t>
+              <a:t>2026/5/13</a:t>
             </a:fld>
             <a:endParaRPr kumimoji="1" lang="ja-JP" altLang="en-US"/>
           </a:p>
@@ -2050,7 +2053,7 @@
           <a:p>
             <a:fld id="{BCD03394-9BA9-47E9-9E8A-35AE17051D58}" type="datetimeFigureOut">
               <a:rPr kumimoji="1" lang="ja-JP" altLang="en-US" smtClean="0"/>
-              <a:t>2026/1/28</a:t>
+              <a:t>2026/5/13</a:t>
             </a:fld>
             <a:endParaRPr kumimoji="1" lang="ja-JP" altLang="en-US"/>
           </a:p>
@@ -2191,7 +2194,7 @@
           <a:p>
             <a:fld id="{BCD03394-9BA9-47E9-9E8A-35AE17051D58}" type="datetimeFigureOut">
               <a:rPr kumimoji="1" lang="ja-JP" altLang="en-US" smtClean="0"/>
-              <a:t>2026/1/28</a:t>
+              <a:t>2026/5/13</a:t>
             </a:fld>
             <a:endParaRPr kumimoji="1" lang="ja-JP" altLang="en-US"/>
           </a:p>
@@ -2304,7 +2307,7 @@
           <a:p>
             <a:fld id="{BCD03394-9BA9-47E9-9E8A-35AE17051D58}" type="datetimeFigureOut">
               <a:rPr kumimoji="1" lang="ja-JP" altLang="en-US" smtClean="0"/>
-              <a:t>2026/1/28</a:t>
+              <a:t>2026/5/13</a:t>
             </a:fld>
             <a:endParaRPr kumimoji="1" lang="ja-JP" altLang="en-US"/>
           </a:p>
@@ -2647,7 +2650,7 @@
           <a:p>
             <a:fld id="{BCD03394-9BA9-47E9-9E8A-35AE17051D58}" type="datetimeFigureOut">
               <a:rPr kumimoji="1" lang="ja-JP" altLang="en-US" smtClean="0"/>
-              <a:t>2026/1/28</a:t>
+              <a:t>2026/5/13</a:t>
             </a:fld>
             <a:endParaRPr kumimoji="1" lang="ja-JP" altLang="en-US"/>
           </a:p>
@@ -2935,7 +2938,7 @@
           <a:p>
             <a:fld id="{BCD03394-9BA9-47E9-9E8A-35AE17051D58}" type="datetimeFigureOut">
               <a:rPr kumimoji="1" lang="ja-JP" altLang="en-US" smtClean="0"/>
-              <a:t>2026/1/28</a:t>
+              <a:t>2026/5/13</a:t>
             </a:fld>
             <a:endParaRPr kumimoji="1" lang="ja-JP" altLang="en-US"/>
           </a:p>
@@ -3208,7 +3211,7 @@
           <a:p>
             <a:fld id="{BCD03394-9BA9-47E9-9E8A-35AE17051D58}" type="datetimeFigureOut">
               <a:rPr kumimoji="1" lang="ja-JP" altLang="en-US" smtClean="0"/>
-              <a:t>2026/1/28</a:t>
+              <a:t>2026/5/13</a:t>
             </a:fld>
             <a:endParaRPr kumimoji="1" lang="ja-JP" altLang="en-US"/>
           </a:p>
@@ -4436,6 +4439,948 @@
     <p:extLst>
       <p:ext uri="{BB962C8B-B14F-4D97-AF65-F5344CB8AC3E}">
         <p14:creationId xmlns:p14="http://schemas.microsoft.com/office/powerpoint/2010/main" val="3342608485"/>
+      </p:ext>
+    </p:extLst>
+  </p:cSld>
+  <p:clrMapOvr>
+    <a:masterClrMapping/>
+  </p:clrMapOvr>
+</p:sld>
+</file>
+
+<file path=ppt/slides/slide5.xml><?xml version="1.0" encoding="utf-8"?>
+<p:sld xmlns:a="http://schemas.openxmlformats.org/drawingml/2006/main" xmlns:r="http://schemas.openxmlformats.org/officeDocument/2006/relationships" xmlns:p="http://schemas.openxmlformats.org/presentationml/2006/main">
+  <p:cSld>
+    <p:spTree>
+      <p:nvGrpSpPr>
+        <p:cNvPr id="1" name="">
+          <a:extLst>
+            <a:ext uri="{FF2B5EF4-FFF2-40B4-BE49-F238E27FC236}">
+              <a16:creationId xmlns:a16="http://schemas.microsoft.com/office/drawing/2014/main" id="{3B883D4D-474E-ACAA-D307-079EAFDB7742}"/>
+            </a:ext>
+          </a:extLst>
+        </p:cNvPr>
+        <p:cNvGrpSpPr/>
+        <p:nvPr/>
+      </p:nvGrpSpPr>
+      <p:grpSpPr>
+        <a:xfrm>
+          <a:off x="0" y="0"/>
+          <a:ext cx="0" cy="0"/>
+          <a:chOff x="0" y="0"/>
+          <a:chExt cx="0" cy="0"/>
+        </a:xfrm>
+      </p:grpSpPr>
+      <p:sp>
+        <p:nvSpPr>
+          <p:cNvPr id="4" name="テキスト ボックス 3">
+            <a:extLst>
+              <a:ext uri="{FF2B5EF4-FFF2-40B4-BE49-F238E27FC236}">
+                <a16:creationId xmlns:a16="http://schemas.microsoft.com/office/drawing/2014/main" id="{275602C8-E246-32A0-D2BD-61C5ED5ACD09}"/>
+              </a:ext>
+            </a:extLst>
+          </p:cNvPr>
+          <p:cNvSpPr txBox="1"/>
+          <p:nvPr/>
+        </p:nvSpPr>
+        <p:spPr>
+          <a:xfrm>
+            <a:off x="371475" y="652760"/>
+            <a:ext cx="3569459" cy="584775"/>
+          </a:xfrm>
+          <a:prstGeom prst="rect">
+            <a:avLst/>
+          </a:prstGeom>
+          <a:noFill/>
+        </p:spPr>
+        <p:txBody>
+          <a:bodyPr wrap="square" rtlCol="0">
+            <a:spAutoFit/>
+          </a:bodyPr>
+          <a:lstStyle/>
+          <a:p>
+            <a:r>
+              <a:rPr kumimoji="1" lang="ja-JP" altLang="en-US" sz="3200" b="1" dirty="0"/>
+              <a:t>今回実装する部分</a:t>
+            </a:r>
+          </a:p>
+        </p:txBody>
+      </p:sp>
+      <p:sp>
+        <p:nvSpPr>
+          <p:cNvPr id="2" name="テキスト ボックス 1">
+            <a:extLst>
+              <a:ext uri="{FF2B5EF4-FFF2-40B4-BE49-F238E27FC236}">
+                <a16:creationId xmlns:a16="http://schemas.microsoft.com/office/drawing/2014/main" id="{93DD6F5D-0A5F-2D42-C2F1-3866F68CF750}"/>
+              </a:ext>
+            </a:extLst>
+          </p:cNvPr>
+          <p:cNvSpPr txBox="1"/>
+          <p:nvPr/>
+        </p:nvSpPr>
+        <p:spPr>
+          <a:xfrm>
+            <a:off x="1142999" y="1371897"/>
+            <a:ext cx="1407018" cy="584775"/>
+          </a:xfrm>
+          <a:prstGeom prst="rect">
+            <a:avLst/>
+          </a:prstGeom>
+          <a:noFill/>
+        </p:spPr>
+        <p:txBody>
+          <a:bodyPr wrap="square" rtlCol="0">
+            <a:spAutoFit/>
+          </a:bodyPr>
+          <a:lstStyle/>
+          <a:p>
+            <a:r>
+              <a:rPr kumimoji="1" lang="ja-JP" altLang="en-US" sz="3200" b="1" dirty="0"/>
+              <a:t>最優先</a:t>
+            </a:r>
+          </a:p>
+        </p:txBody>
+      </p:sp>
+      <p:sp>
+        <p:nvSpPr>
+          <p:cNvPr id="6" name="テキスト ボックス 5">
+            <a:extLst>
+              <a:ext uri="{FF2B5EF4-FFF2-40B4-BE49-F238E27FC236}">
+                <a16:creationId xmlns:a16="http://schemas.microsoft.com/office/drawing/2014/main" id="{621A2018-EA96-82D8-5122-E68A974D15EB}"/>
+              </a:ext>
+            </a:extLst>
+          </p:cNvPr>
+          <p:cNvSpPr txBox="1"/>
+          <p:nvPr/>
+        </p:nvSpPr>
+        <p:spPr>
+          <a:xfrm>
+            <a:off x="1846508" y="2026640"/>
+            <a:ext cx="9763125" cy="584775"/>
+          </a:xfrm>
+          <a:prstGeom prst="rect">
+            <a:avLst/>
+          </a:prstGeom>
+          <a:noFill/>
+        </p:spPr>
+        <p:txBody>
+          <a:bodyPr wrap="square" rtlCol="0">
+            <a:spAutoFit/>
+          </a:bodyPr>
+          <a:lstStyle/>
+          <a:p>
+            <a:r>
+              <a:rPr kumimoji="1" lang="ja-JP" altLang="en-US" sz="3200" b="1" dirty="0"/>
+              <a:t>端末の向きに合わせて星空が動く</a:t>
+            </a:r>
+          </a:p>
+        </p:txBody>
+      </p:sp>
+      <p:sp>
+        <p:nvSpPr>
+          <p:cNvPr id="3" name="テキスト ボックス 2">
+            <a:extLst>
+              <a:ext uri="{FF2B5EF4-FFF2-40B4-BE49-F238E27FC236}">
+                <a16:creationId xmlns:a16="http://schemas.microsoft.com/office/drawing/2014/main" id="{F37FD2AA-1632-F98A-2531-9294301FAE30}"/>
+              </a:ext>
+            </a:extLst>
+          </p:cNvPr>
+          <p:cNvSpPr txBox="1"/>
+          <p:nvPr/>
+        </p:nvSpPr>
+        <p:spPr>
+          <a:xfrm>
+            <a:off x="1846507" y="2681383"/>
+            <a:ext cx="9763125" cy="584775"/>
+          </a:xfrm>
+          <a:prstGeom prst="rect">
+            <a:avLst/>
+          </a:prstGeom>
+          <a:noFill/>
+        </p:spPr>
+        <p:txBody>
+          <a:bodyPr wrap="square" rtlCol="0">
+            <a:spAutoFit/>
+          </a:bodyPr>
+          <a:lstStyle/>
+          <a:p>
+            <a:r>
+              <a:rPr kumimoji="1" lang="ja-JP" altLang="en-US" sz="3200" b="1" dirty="0"/>
+              <a:t>やぎ座・こと座・わし座・はくちょう座の星を表示</a:t>
+            </a:r>
+          </a:p>
+        </p:txBody>
+      </p:sp>
+      <p:sp>
+        <p:nvSpPr>
+          <p:cNvPr id="7" name="テキスト ボックス 6">
+            <a:extLst>
+              <a:ext uri="{FF2B5EF4-FFF2-40B4-BE49-F238E27FC236}">
+                <a16:creationId xmlns:a16="http://schemas.microsoft.com/office/drawing/2014/main" id="{543B88CF-D82F-9D31-739A-B67D75DEA874}"/>
+              </a:ext>
+            </a:extLst>
+          </p:cNvPr>
+          <p:cNvSpPr txBox="1"/>
+          <p:nvPr/>
+        </p:nvSpPr>
+        <p:spPr>
+          <a:xfrm>
+            <a:off x="1846506" y="3400520"/>
+            <a:ext cx="9763125" cy="584775"/>
+          </a:xfrm>
+          <a:prstGeom prst="rect">
+            <a:avLst/>
+          </a:prstGeom>
+          <a:noFill/>
+        </p:spPr>
+        <p:txBody>
+          <a:bodyPr wrap="square" rtlCol="0">
+            <a:spAutoFit/>
+          </a:bodyPr>
+          <a:lstStyle/>
+          <a:p>
+            <a:r>
+              <a:rPr kumimoji="1" lang="ja-JP" altLang="en-US" sz="3200" b="1" dirty="0"/>
+              <a:t>星をタップして、正しい星同士なら線でつながる</a:t>
+            </a:r>
+          </a:p>
+        </p:txBody>
+      </p:sp>
+      <p:sp>
+        <p:nvSpPr>
+          <p:cNvPr id="8" name="テキスト ボックス 7">
+            <a:extLst>
+              <a:ext uri="{FF2B5EF4-FFF2-40B4-BE49-F238E27FC236}">
+                <a16:creationId xmlns:a16="http://schemas.microsoft.com/office/drawing/2014/main" id="{9405360B-EB75-6D0F-CDAA-B47CBB2954AC}"/>
+              </a:ext>
+            </a:extLst>
+          </p:cNvPr>
+          <p:cNvSpPr txBox="1"/>
+          <p:nvPr/>
+        </p:nvSpPr>
+        <p:spPr>
+          <a:xfrm>
+            <a:off x="1846505" y="4119657"/>
+            <a:ext cx="9763125" cy="584775"/>
+          </a:xfrm>
+          <a:prstGeom prst="rect">
+            <a:avLst/>
+          </a:prstGeom>
+          <a:noFill/>
+        </p:spPr>
+        <p:txBody>
+          <a:bodyPr wrap="square" rtlCol="0">
+            <a:spAutoFit/>
+          </a:bodyPr>
+          <a:lstStyle/>
+          <a:p>
+            <a:r>
+              <a:rPr kumimoji="1" lang="ja-JP" altLang="en-US" sz="3200" b="1" dirty="0"/>
+              <a:t>星座完成で図鑑登録</a:t>
+            </a:r>
+          </a:p>
+        </p:txBody>
+      </p:sp>
+      <p:sp>
+        <p:nvSpPr>
+          <p:cNvPr id="9" name="テキスト ボックス 8">
+            <a:extLst>
+              <a:ext uri="{FF2B5EF4-FFF2-40B4-BE49-F238E27FC236}">
+                <a16:creationId xmlns:a16="http://schemas.microsoft.com/office/drawing/2014/main" id="{B0AF78B3-EB6A-7DD4-6E93-1AF27B80EBC3}"/>
+              </a:ext>
+            </a:extLst>
+          </p:cNvPr>
+          <p:cNvSpPr txBox="1"/>
+          <p:nvPr/>
+        </p:nvSpPr>
+        <p:spPr>
+          <a:xfrm>
+            <a:off x="1846504" y="4838794"/>
+            <a:ext cx="9763125" cy="584775"/>
+          </a:xfrm>
+          <a:prstGeom prst="rect">
+            <a:avLst/>
+          </a:prstGeom>
+          <a:noFill/>
+        </p:spPr>
+        <p:txBody>
+          <a:bodyPr wrap="square" rtlCol="0">
+            <a:spAutoFit/>
+          </a:bodyPr>
+          <a:lstStyle/>
+          <a:p>
+            <a:r>
+              <a:rPr kumimoji="1" lang="ja-JP" altLang="en-US" sz="3200" b="1" dirty="0"/>
+              <a:t>図鑑一覧・詳細</a:t>
+            </a:r>
+          </a:p>
+        </p:txBody>
+      </p:sp>
+    </p:spTree>
+    <p:extLst>
+      <p:ext uri="{BB962C8B-B14F-4D97-AF65-F5344CB8AC3E}">
+        <p14:creationId xmlns:p14="http://schemas.microsoft.com/office/powerpoint/2010/main" val="3424894062"/>
+      </p:ext>
+    </p:extLst>
+  </p:cSld>
+  <p:clrMapOvr>
+    <a:masterClrMapping/>
+  </p:clrMapOvr>
+</p:sld>
+</file>
+
+<file path=ppt/slides/slide6.xml><?xml version="1.0" encoding="utf-8"?>
+<p:sld xmlns:a="http://schemas.openxmlformats.org/drawingml/2006/main" xmlns:r="http://schemas.openxmlformats.org/officeDocument/2006/relationships" xmlns:p="http://schemas.openxmlformats.org/presentationml/2006/main">
+  <p:cSld>
+    <p:spTree>
+      <p:nvGrpSpPr>
+        <p:cNvPr id="1" name="">
+          <a:extLst>
+            <a:ext uri="{FF2B5EF4-FFF2-40B4-BE49-F238E27FC236}">
+              <a16:creationId xmlns:a16="http://schemas.microsoft.com/office/drawing/2014/main" id="{6D132F03-B503-D1A8-46B1-0F375622CE6D}"/>
+            </a:ext>
+          </a:extLst>
+        </p:cNvPr>
+        <p:cNvGrpSpPr/>
+        <p:nvPr/>
+      </p:nvGrpSpPr>
+      <p:grpSpPr>
+        <a:xfrm>
+          <a:off x="0" y="0"/>
+          <a:ext cx="0" cy="0"/>
+          <a:chOff x="0" y="0"/>
+          <a:chExt cx="0" cy="0"/>
+        </a:xfrm>
+      </p:grpSpPr>
+      <p:sp>
+        <p:nvSpPr>
+          <p:cNvPr id="4" name="テキスト ボックス 3">
+            <a:extLst>
+              <a:ext uri="{FF2B5EF4-FFF2-40B4-BE49-F238E27FC236}">
+                <a16:creationId xmlns:a16="http://schemas.microsoft.com/office/drawing/2014/main" id="{8D89C33D-7CF9-16D9-A20E-09143A90A269}"/>
+              </a:ext>
+            </a:extLst>
+          </p:cNvPr>
+          <p:cNvSpPr txBox="1"/>
+          <p:nvPr/>
+        </p:nvSpPr>
+        <p:spPr>
+          <a:xfrm>
+            <a:off x="371475" y="652760"/>
+            <a:ext cx="3569459" cy="584775"/>
+          </a:xfrm>
+          <a:prstGeom prst="rect">
+            <a:avLst/>
+          </a:prstGeom>
+          <a:noFill/>
+        </p:spPr>
+        <p:txBody>
+          <a:bodyPr wrap="square" rtlCol="0">
+            <a:spAutoFit/>
+          </a:bodyPr>
+          <a:lstStyle/>
+          <a:p>
+            <a:r>
+              <a:rPr kumimoji="1" lang="ja-JP" altLang="en-US" sz="3200" b="1" dirty="0"/>
+              <a:t>使用する技術</a:t>
+            </a:r>
+          </a:p>
+        </p:txBody>
+      </p:sp>
+      <p:sp>
+        <p:nvSpPr>
+          <p:cNvPr id="2" name="テキスト ボックス 1">
+            <a:extLst>
+              <a:ext uri="{FF2B5EF4-FFF2-40B4-BE49-F238E27FC236}">
+                <a16:creationId xmlns:a16="http://schemas.microsoft.com/office/drawing/2014/main" id="{854885F1-71E7-94FD-BA09-4044F60C565B}"/>
+              </a:ext>
+            </a:extLst>
+          </p:cNvPr>
+          <p:cNvSpPr txBox="1"/>
+          <p:nvPr/>
+        </p:nvSpPr>
+        <p:spPr>
+          <a:xfrm>
+            <a:off x="1142998" y="1371897"/>
+            <a:ext cx="1980129" cy="584775"/>
+          </a:xfrm>
+          <a:prstGeom prst="rect">
+            <a:avLst/>
+          </a:prstGeom>
+          <a:noFill/>
+        </p:spPr>
+        <p:txBody>
+          <a:bodyPr wrap="square" rtlCol="0">
+            <a:spAutoFit/>
+          </a:bodyPr>
+          <a:lstStyle/>
+          <a:p>
+            <a:r>
+              <a:rPr kumimoji="1" lang="ja-JP" altLang="en-US" sz="3200" b="1" dirty="0"/>
+              <a:t>標準機能</a:t>
+            </a:r>
+          </a:p>
+        </p:txBody>
+      </p:sp>
+      <p:sp>
+        <p:nvSpPr>
+          <p:cNvPr id="6" name="テキスト ボックス 5">
+            <a:extLst>
+              <a:ext uri="{FF2B5EF4-FFF2-40B4-BE49-F238E27FC236}">
+                <a16:creationId xmlns:a16="http://schemas.microsoft.com/office/drawing/2014/main" id="{0D414B9C-218E-B18B-02CE-49CF4F4D9598}"/>
+              </a:ext>
+            </a:extLst>
+          </p:cNvPr>
+          <p:cNvSpPr txBox="1"/>
+          <p:nvPr/>
+        </p:nvSpPr>
+        <p:spPr>
+          <a:xfrm>
+            <a:off x="1846508" y="2026640"/>
+            <a:ext cx="9763125" cy="584775"/>
+          </a:xfrm>
+          <a:prstGeom prst="rect">
+            <a:avLst/>
+          </a:prstGeom>
+          <a:noFill/>
+        </p:spPr>
+        <p:txBody>
+          <a:bodyPr wrap="square" rtlCol="0">
+            <a:spAutoFit/>
+          </a:bodyPr>
+          <a:lstStyle/>
+          <a:p>
+            <a:r>
+              <a:rPr kumimoji="1" lang="en-US" altLang="ja-JP" sz="3200" b="1" dirty="0"/>
+              <a:t>Material</a:t>
+            </a:r>
+            <a:endParaRPr kumimoji="1" lang="ja-JP" altLang="en-US" sz="3200" b="1" dirty="0"/>
+          </a:p>
+        </p:txBody>
+      </p:sp>
+      <p:sp>
+        <p:nvSpPr>
+          <p:cNvPr id="3" name="テキスト ボックス 2">
+            <a:extLst>
+              <a:ext uri="{FF2B5EF4-FFF2-40B4-BE49-F238E27FC236}">
+                <a16:creationId xmlns:a16="http://schemas.microsoft.com/office/drawing/2014/main" id="{3C939102-0CD4-E7C4-256B-4DC38F97090C}"/>
+              </a:ext>
+            </a:extLst>
+          </p:cNvPr>
+          <p:cNvSpPr txBox="1"/>
+          <p:nvPr/>
+        </p:nvSpPr>
+        <p:spPr>
+          <a:xfrm>
+            <a:off x="1846507" y="2681383"/>
+            <a:ext cx="9763125" cy="584775"/>
+          </a:xfrm>
+          <a:prstGeom prst="rect">
+            <a:avLst/>
+          </a:prstGeom>
+          <a:noFill/>
+        </p:spPr>
+        <p:txBody>
+          <a:bodyPr wrap="square" rtlCol="0">
+            <a:spAutoFit/>
+          </a:bodyPr>
+          <a:lstStyle/>
+          <a:p>
+            <a:r>
+              <a:rPr kumimoji="1" lang="en-US" altLang="ja-JP" sz="3200" b="1" dirty="0"/>
+              <a:t>Navigator</a:t>
+            </a:r>
+            <a:endParaRPr kumimoji="1" lang="ja-JP" altLang="en-US" sz="3200" b="1" dirty="0"/>
+          </a:p>
+        </p:txBody>
+      </p:sp>
+      <p:sp>
+        <p:nvSpPr>
+          <p:cNvPr id="5" name="テキスト ボックス 4">
+            <a:extLst>
+              <a:ext uri="{FF2B5EF4-FFF2-40B4-BE49-F238E27FC236}">
+                <a16:creationId xmlns:a16="http://schemas.microsoft.com/office/drawing/2014/main" id="{76308A95-9127-EF38-8B46-7C296E612C83}"/>
+              </a:ext>
+            </a:extLst>
+          </p:cNvPr>
+          <p:cNvSpPr txBox="1"/>
+          <p:nvPr/>
+        </p:nvSpPr>
+        <p:spPr>
+          <a:xfrm>
+            <a:off x="1846507" y="3336126"/>
+            <a:ext cx="9763125" cy="584775"/>
+          </a:xfrm>
+          <a:prstGeom prst="rect">
+            <a:avLst/>
+          </a:prstGeom>
+          <a:noFill/>
+        </p:spPr>
+        <p:txBody>
+          <a:bodyPr wrap="square" rtlCol="0">
+            <a:spAutoFit/>
+          </a:bodyPr>
+          <a:lstStyle/>
+          <a:p>
+            <a:r>
+              <a:rPr kumimoji="1" lang="en-US" altLang="ja-JP" sz="3200" b="1" dirty="0" err="1"/>
+              <a:t>CustomPainter</a:t>
+            </a:r>
+            <a:endParaRPr kumimoji="1" lang="ja-JP" altLang="en-US" sz="3200" b="1" dirty="0"/>
+          </a:p>
+        </p:txBody>
+      </p:sp>
+      <p:sp>
+        <p:nvSpPr>
+          <p:cNvPr id="11" name="テキスト ボックス 10">
+            <a:extLst>
+              <a:ext uri="{FF2B5EF4-FFF2-40B4-BE49-F238E27FC236}">
+                <a16:creationId xmlns:a16="http://schemas.microsoft.com/office/drawing/2014/main" id="{938C8B82-E277-CE61-F5F6-FD33A1E09BBD}"/>
+              </a:ext>
+            </a:extLst>
+          </p:cNvPr>
+          <p:cNvSpPr txBox="1"/>
+          <p:nvPr/>
+        </p:nvSpPr>
+        <p:spPr>
+          <a:xfrm>
+            <a:off x="1846506" y="5230387"/>
+            <a:ext cx="9763125" cy="584775"/>
+          </a:xfrm>
+          <a:prstGeom prst="rect">
+            <a:avLst/>
+          </a:prstGeom>
+          <a:noFill/>
+        </p:spPr>
+        <p:txBody>
+          <a:bodyPr wrap="square" rtlCol="0">
+            <a:spAutoFit/>
+          </a:bodyPr>
+          <a:lstStyle/>
+          <a:p>
+            <a:r>
+              <a:rPr kumimoji="1" lang="en-US" altLang="ja-JP" sz="3200" b="1" dirty="0" err="1"/>
+              <a:t>dart:math</a:t>
+            </a:r>
+            <a:endParaRPr kumimoji="1" lang="ja-JP" altLang="en-US" sz="3200" b="1" dirty="0"/>
+          </a:p>
+        </p:txBody>
+      </p:sp>
+      <p:sp>
+        <p:nvSpPr>
+          <p:cNvPr id="12" name="テキスト ボックス 11">
+            <a:extLst>
+              <a:ext uri="{FF2B5EF4-FFF2-40B4-BE49-F238E27FC236}">
+                <a16:creationId xmlns:a16="http://schemas.microsoft.com/office/drawing/2014/main" id="{E187F748-AF6E-2F39-11E4-ABCE62CB8DBD}"/>
+              </a:ext>
+            </a:extLst>
+          </p:cNvPr>
+          <p:cNvSpPr txBox="1"/>
+          <p:nvPr/>
+        </p:nvSpPr>
+        <p:spPr>
+          <a:xfrm>
+            <a:off x="1846506" y="4575644"/>
+            <a:ext cx="9763125" cy="584775"/>
+          </a:xfrm>
+          <a:prstGeom prst="rect">
+            <a:avLst/>
+          </a:prstGeom>
+          <a:noFill/>
+        </p:spPr>
+        <p:txBody>
+          <a:bodyPr wrap="square" rtlCol="0">
+            <a:spAutoFit/>
+          </a:bodyPr>
+          <a:lstStyle/>
+          <a:p>
+            <a:r>
+              <a:rPr kumimoji="1" lang="en-US" altLang="ja-JP" sz="3200" b="1" dirty="0" err="1"/>
+              <a:t>AnimationController</a:t>
+            </a:r>
+            <a:endParaRPr kumimoji="1" lang="ja-JP" altLang="en-US" sz="3200" b="1" dirty="0"/>
+          </a:p>
+        </p:txBody>
+      </p:sp>
+      <p:sp>
+        <p:nvSpPr>
+          <p:cNvPr id="13" name="テキスト ボックス 12">
+            <a:extLst>
+              <a:ext uri="{FF2B5EF4-FFF2-40B4-BE49-F238E27FC236}">
+                <a16:creationId xmlns:a16="http://schemas.microsoft.com/office/drawing/2014/main" id="{13B5AB29-D6E9-B673-D393-7F2EB6174F2E}"/>
+              </a:ext>
+            </a:extLst>
+          </p:cNvPr>
+          <p:cNvSpPr txBox="1"/>
+          <p:nvPr/>
+        </p:nvSpPr>
+        <p:spPr>
+          <a:xfrm>
+            <a:off x="1846507" y="3990869"/>
+            <a:ext cx="9763125" cy="584775"/>
+          </a:xfrm>
+          <a:prstGeom prst="rect">
+            <a:avLst/>
+          </a:prstGeom>
+          <a:noFill/>
+        </p:spPr>
+        <p:txBody>
+          <a:bodyPr wrap="square" rtlCol="0">
+            <a:spAutoFit/>
+          </a:bodyPr>
+          <a:lstStyle/>
+          <a:p>
+            <a:r>
+              <a:rPr kumimoji="1" lang="en-US" altLang="ja-JP" sz="3200" b="1" dirty="0" err="1"/>
+              <a:t>GestureDetector</a:t>
+            </a:r>
+            <a:endParaRPr kumimoji="1" lang="ja-JP" altLang="en-US" sz="3200" b="1" dirty="0"/>
+          </a:p>
+        </p:txBody>
+      </p:sp>
+    </p:spTree>
+    <p:extLst>
+      <p:ext uri="{BB962C8B-B14F-4D97-AF65-F5344CB8AC3E}">
+        <p14:creationId xmlns:p14="http://schemas.microsoft.com/office/powerpoint/2010/main" val="711462244"/>
+      </p:ext>
+    </p:extLst>
+  </p:cSld>
+  <p:clrMapOvr>
+    <a:masterClrMapping/>
+  </p:clrMapOvr>
+</p:sld>
+</file>
+
+<file path=ppt/slides/slide7.xml><?xml version="1.0" encoding="utf-8"?>
+<p:sld xmlns:a="http://schemas.openxmlformats.org/drawingml/2006/main" xmlns:r="http://schemas.openxmlformats.org/officeDocument/2006/relationships" xmlns:p="http://schemas.openxmlformats.org/presentationml/2006/main">
+  <p:cSld>
+    <p:spTree>
+      <p:nvGrpSpPr>
+        <p:cNvPr id="1" name="">
+          <a:extLst>
+            <a:ext uri="{FF2B5EF4-FFF2-40B4-BE49-F238E27FC236}">
+              <a16:creationId xmlns:a16="http://schemas.microsoft.com/office/drawing/2014/main" id="{8B803983-80A0-045A-2C49-807EA48E4A4D}"/>
+            </a:ext>
+          </a:extLst>
+        </p:cNvPr>
+        <p:cNvGrpSpPr/>
+        <p:nvPr/>
+      </p:nvGrpSpPr>
+      <p:grpSpPr>
+        <a:xfrm>
+          <a:off x="0" y="0"/>
+          <a:ext cx="0" cy="0"/>
+          <a:chOff x="0" y="0"/>
+          <a:chExt cx="0" cy="0"/>
+        </a:xfrm>
+      </p:grpSpPr>
+      <p:sp>
+        <p:nvSpPr>
+          <p:cNvPr id="4" name="テキスト ボックス 3">
+            <a:extLst>
+              <a:ext uri="{FF2B5EF4-FFF2-40B4-BE49-F238E27FC236}">
+                <a16:creationId xmlns:a16="http://schemas.microsoft.com/office/drawing/2014/main" id="{D18CFC51-0545-8AE6-B8ED-0FE0FF637586}"/>
+              </a:ext>
+            </a:extLst>
+          </p:cNvPr>
+          <p:cNvSpPr txBox="1"/>
+          <p:nvPr/>
+        </p:nvSpPr>
+        <p:spPr>
+          <a:xfrm>
+            <a:off x="371475" y="652760"/>
+            <a:ext cx="3569459" cy="584775"/>
+          </a:xfrm>
+          <a:prstGeom prst="rect">
+            <a:avLst/>
+          </a:prstGeom>
+          <a:noFill/>
+        </p:spPr>
+        <p:txBody>
+          <a:bodyPr wrap="square" rtlCol="0">
+            <a:spAutoFit/>
+          </a:bodyPr>
+          <a:lstStyle/>
+          <a:p>
+            <a:r>
+              <a:rPr kumimoji="1" lang="ja-JP" altLang="en-US" sz="3200" b="1" dirty="0"/>
+              <a:t>使用する技術</a:t>
+            </a:r>
+          </a:p>
+        </p:txBody>
+      </p:sp>
+      <p:sp>
+        <p:nvSpPr>
+          <p:cNvPr id="2" name="テキスト ボックス 1">
+            <a:extLst>
+              <a:ext uri="{FF2B5EF4-FFF2-40B4-BE49-F238E27FC236}">
+                <a16:creationId xmlns:a16="http://schemas.microsoft.com/office/drawing/2014/main" id="{A184F2A3-DB49-9ED9-4376-8901E34ED971}"/>
+              </a:ext>
+            </a:extLst>
+          </p:cNvPr>
+          <p:cNvSpPr txBox="1"/>
+          <p:nvPr/>
+        </p:nvSpPr>
+        <p:spPr>
+          <a:xfrm>
+            <a:off x="1142998" y="1371897"/>
+            <a:ext cx="3680140" cy="584775"/>
+          </a:xfrm>
+          <a:prstGeom prst="rect">
+            <a:avLst/>
+          </a:prstGeom>
+          <a:noFill/>
+        </p:spPr>
+        <p:txBody>
+          <a:bodyPr wrap="square" rtlCol="0">
+            <a:spAutoFit/>
+          </a:bodyPr>
+          <a:lstStyle/>
+          <a:p>
+            <a:r>
+              <a:rPr lang="ja-JP" altLang="en-US" sz="3200" b="1" dirty="0"/>
+              <a:t>追加ライブラリ</a:t>
+            </a:r>
+            <a:endParaRPr kumimoji="1" lang="ja-JP" altLang="en-US" sz="3200" b="1" dirty="0"/>
+          </a:p>
+        </p:txBody>
+      </p:sp>
+      <p:sp>
+        <p:nvSpPr>
+          <p:cNvPr id="6" name="テキスト ボックス 5">
+            <a:extLst>
+              <a:ext uri="{FF2B5EF4-FFF2-40B4-BE49-F238E27FC236}">
+                <a16:creationId xmlns:a16="http://schemas.microsoft.com/office/drawing/2014/main" id="{BFA4616E-8A03-21A8-FA6C-9C78C41D7225}"/>
+              </a:ext>
+            </a:extLst>
+          </p:cNvPr>
+          <p:cNvSpPr txBox="1"/>
+          <p:nvPr/>
+        </p:nvSpPr>
+        <p:spPr>
+          <a:xfrm>
+            <a:off x="1846508" y="2026640"/>
+            <a:ext cx="9763125" cy="584775"/>
+          </a:xfrm>
+          <a:prstGeom prst="rect">
+            <a:avLst/>
+          </a:prstGeom>
+          <a:noFill/>
+        </p:spPr>
+        <p:txBody>
+          <a:bodyPr wrap="square" rtlCol="0">
+            <a:spAutoFit/>
+          </a:bodyPr>
+          <a:lstStyle/>
+          <a:p>
+            <a:r>
+              <a:rPr kumimoji="1" lang="en-US" altLang="ja-JP" sz="3200" b="1" dirty="0"/>
+              <a:t>geolocator</a:t>
+            </a:r>
+            <a:endParaRPr kumimoji="1" lang="ja-JP" altLang="en-US" sz="3200" b="1" dirty="0"/>
+          </a:p>
+        </p:txBody>
+      </p:sp>
+      <p:sp>
+        <p:nvSpPr>
+          <p:cNvPr id="3" name="テキスト ボックス 2">
+            <a:extLst>
+              <a:ext uri="{FF2B5EF4-FFF2-40B4-BE49-F238E27FC236}">
+                <a16:creationId xmlns:a16="http://schemas.microsoft.com/office/drawing/2014/main" id="{D8BADE8C-2008-036D-8F4A-1B343158C19B}"/>
+              </a:ext>
+            </a:extLst>
+          </p:cNvPr>
+          <p:cNvSpPr txBox="1"/>
+          <p:nvPr/>
+        </p:nvSpPr>
+        <p:spPr>
+          <a:xfrm>
+            <a:off x="1846507" y="2681383"/>
+            <a:ext cx="9763125" cy="584775"/>
+          </a:xfrm>
+          <a:prstGeom prst="rect">
+            <a:avLst/>
+          </a:prstGeom>
+          <a:noFill/>
+        </p:spPr>
+        <p:txBody>
+          <a:bodyPr wrap="square" rtlCol="0">
+            <a:spAutoFit/>
+          </a:bodyPr>
+          <a:lstStyle/>
+          <a:p>
+            <a:r>
+              <a:rPr kumimoji="1" lang="en-US" altLang="ja-JP" sz="3200" b="1" dirty="0" err="1"/>
+              <a:t>flutter_rotation_sensor</a:t>
+            </a:r>
+            <a:endParaRPr kumimoji="1" lang="ja-JP" altLang="en-US" sz="3200" b="1" dirty="0"/>
+          </a:p>
+        </p:txBody>
+      </p:sp>
+      <p:sp>
+        <p:nvSpPr>
+          <p:cNvPr id="5" name="テキスト ボックス 4">
+            <a:extLst>
+              <a:ext uri="{FF2B5EF4-FFF2-40B4-BE49-F238E27FC236}">
+                <a16:creationId xmlns:a16="http://schemas.microsoft.com/office/drawing/2014/main" id="{0E27B530-4753-652C-9F98-F26FC06E1875}"/>
+              </a:ext>
+            </a:extLst>
+          </p:cNvPr>
+          <p:cNvSpPr txBox="1"/>
+          <p:nvPr/>
+        </p:nvSpPr>
+        <p:spPr>
+          <a:xfrm>
+            <a:off x="1846507" y="3336126"/>
+            <a:ext cx="9763125" cy="584775"/>
+          </a:xfrm>
+          <a:prstGeom prst="rect">
+            <a:avLst/>
+          </a:prstGeom>
+          <a:noFill/>
+        </p:spPr>
+        <p:txBody>
+          <a:bodyPr wrap="square" rtlCol="0">
+            <a:spAutoFit/>
+          </a:bodyPr>
+          <a:lstStyle/>
+          <a:p>
+            <a:r>
+              <a:rPr kumimoji="1" lang="en-US" altLang="ja-JP" sz="3200" b="1" dirty="0"/>
+              <a:t>provider</a:t>
+            </a:r>
+            <a:endParaRPr kumimoji="1" lang="ja-JP" altLang="en-US" sz="3200" b="1" dirty="0"/>
+          </a:p>
+        </p:txBody>
+      </p:sp>
+      <p:sp>
+        <p:nvSpPr>
+          <p:cNvPr id="11" name="テキスト ボックス 10">
+            <a:extLst>
+              <a:ext uri="{FF2B5EF4-FFF2-40B4-BE49-F238E27FC236}">
+                <a16:creationId xmlns:a16="http://schemas.microsoft.com/office/drawing/2014/main" id="{1F1ADF0B-4336-962E-0BC7-BE34424EF6B0}"/>
+              </a:ext>
+            </a:extLst>
+          </p:cNvPr>
+          <p:cNvSpPr txBox="1"/>
+          <p:nvPr/>
+        </p:nvSpPr>
+        <p:spPr>
+          <a:xfrm>
+            <a:off x="1846506" y="5230387"/>
+            <a:ext cx="9763125" cy="584775"/>
+          </a:xfrm>
+          <a:prstGeom prst="rect">
+            <a:avLst/>
+          </a:prstGeom>
+          <a:noFill/>
+        </p:spPr>
+        <p:txBody>
+          <a:bodyPr wrap="square" rtlCol="0">
+            <a:spAutoFit/>
+          </a:bodyPr>
+          <a:lstStyle/>
+          <a:p>
+            <a:r>
+              <a:rPr kumimoji="1" lang="en-US" altLang="ja-JP" sz="3200" b="1" dirty="0"/>
+              <a:t>(</a:t>
+            </a:r>
+            <a:r>
+              <a:rPr kumimoji="1" lang="en-US" altLang="ja-JP" sz="3200" b="1" dirty="0" err="1"/>
+              <a:t>flutter_compass</a:t>
+            </a:r>
+            <a:r>
+              <a:rPr kumimoji="1" lang="en-US" altLang="ja-JP" sz="3200" b="1" dirty="0"/>
+              <a:t> / </a:t>
+            </a:r>
+            <a:r>
+              <a:rPr kumimoji="1" lang="en-US" altLang="ja-JP" sz="3200" b="1" dirty="0" err="1"/>
+              <a:t>sensors_plus</a:t>
+            </a:r>
+            <a:r>
+              <a:rPr kumimoji="1" lang="en-US" altLang="ja-JP" sz="3200" b="1" dirty="0"/>
+              <a:t>)</a:t>
+            </a:r>
+            <a:endParaRPr kumimoji="1" lang="ja-JP" altLang="en-US" sz="3200" b="1" dirty="0"/>
+          </a:p>
+        </p:txBody>
+      </p:sp>
+      <p:sp>
+        <p:nvSpPr>
+          <p:cNvPr id="12" name="テキスト ボックス 11">
+            <a:extLst>
+              <a:ext uri="{FF2B5EF4-FFF2-40B4-BE49-F238E27FC236}">
+                <a16:creationId xmlns:a16="http://schemas.microsoft.com/office/drawing/2014/main" id="{C2C522C7-3B8B-0772-7C28-4FFFC8614883}"/>
+              </a:ext>
+            </a:extLst>
+          </p:cNvPr>
+          <p:cNvSpPr txBox="1"/>
+          <p:nvPr/>
+        </p:nvSpPr>
+        <p:spPr>
+          <a:xfrm>
+            <a:off x="1846506" y="4575644"/>
+            <a:ext cx="9763125" cy="584775"/>
+          </a:xfrm>
+          <a:prstGeom prst="rect">
+            <a:avLst/>
+          </a:prstGeom>
+          <a:noFill/>
+        </p:spPr>
+        <p:txBody>
+          <a:bodyPr wrap="square" rtlCol="0">
+            <a:spAutoFit/>
+          </a:bodyPr>
+          <a:lstStyle/>
+          <a:p>
+            <a:r>
+              <a:rPr kumimoji="1" lang="en-US" altLang="ja-JP" sz="3200" b="1" dirty="0" err="1"/>
+              <a:t>vector_math</a:t>
+            </a:r>
+            <a:endParaRPr kumimoji="1" lang="ja-JP" altLang="en-US" sz="3200" b="1" dirty="0"/>
+          </a:p>
+        </p:txBody>
+      </p:sp>
+      <p:sp>
+        <p:nvSpPr>
+          <p:cNvPr id="13" name="テキスト ボックス 12">
+            <a:extLst>
+              <a:ext uri="{FF2B5EF4-FFF2-40B4-BE49-F238E27FC236}">
+                <a16:creationId xmlns:a16="http://schemas.microsoft.com/office/drawing/2014/main" id="{6DFD9331-4014-D3F5-8294-940150DDD0BF}"/>
+              </a:ext>
+            </a:extLst>
+          </p:cNvPr>
+          <p:cNvSpPr txBox="1"/>
+          <p:nvPr/>
+        </p:nvSpPr>
+        <p:spPr>
+          <a:xfrm>
+            <a:off x="1846507" y="3990869"/>
+            <a:ext cx="9763125" cy="584775"/>
+          </a:xfrm>
+          <a:prstGeom prst="rect">
+            <a:avLst/>
+          </a:prstGeom>
+          <a:noFill/>
+        </p:spPr>
+        <p:txBody>
+          <a:bodyPr wrap="square" rtlCol="0">
+            <a:spAutoFit/>
+          </a:bodyPr>
+          <a:lstStyle/>
+          <a:p>
+            <a:r>
+              <a:rPr kumimoji="1" lang="en-US" altLang="ja-JP" sz="3200" b="1" dirty="0" err="1"/>
+              <a:t>shared_preferences</a:t>
+            </a:r>
+            <a:endParaRPr kumimoji="1" lang="ja-JP" altLang="en-US" sz="3200" b="1" dirty="0"/>
+          </a:p>
+        </p:txBody>
+      </p:sp>
+    </p:spTree>
+    <p:extLst>
+      <p:ext uri="{BB962C8B-B14F-4D97-AF65-F5344CB8AC3E}">
+        <p14:creationId xmlns:p14="http://schemas.microsoft.com/office/powerpoint/2010/main" val="1042397936"/>
       </p:ext>
     </p:extLst>
   </p:cSld>
@@ -4761,20 +5706,20 @@
 </file>
 
 <file path=customXml/item1.xml><?xml version="1.0" encoding="utf-8"?>
-<p:properties xmlns:p="http://schemas.microsoft.com/office/2006/metadata/properties" xmlns:xsi="http://www.w3.org/2001/XMLSchema-instance" xmlns:pc="http://schemas.microsoft.com/office/infopath/2007/PartnerControls">
-  <documentManagement>
-    <_activity xmlns="b905fe17-d65b-40a4-b68e-9ee8fe11f43a" xsi:nil="true"/>
-  </documentManagement>
-</p:properties>
-</file>
-
-<file path=customXml/item2.xml><?xml version="1.0" encoding="utf-8"?>
 <?mso-contentType ?>
 <FormTemplates xmlns="http://schemas.microsoft.com/sharepoint/v3/contenttype/forms">
   <Display>DocumentLibraryForm</Display>
   <Edit>DocumentLibraryForm</Edit>
   <New>DocumentLibraryForm</New>
 </FormTemplates>
+</file>
+
+<file path=customXml/item2.xml><?xml version="1.0" encoding="utf-8"?>
+<p:properties xmlns:p="http://schemas.microsoft.com/office/2006/metadata/properties" xmlns:xsi="http://www.w3.org/2001/XMLSchema-instance" xmlns:pc="http://schemas.microsoft.com/office/infopath/2007/PartnerControls">
+  <documentManagement>
+    <_activity xmlns="b905fe17-d65b-40a4-b68e-9ee8fe11f43a" xsi:nil="true"/>
+  </documentManagement>
+</p:properties>
 </file>
 
 <file path=customXml/item3.xml><?xml version="1.0" encoding="utf-8"?>
@@ -4999,6 +5944,14 @@
 </file>
 
 <file path=customXml/itemProps1.xml><?xml version="1.0" encoding="utf-8"?>
+<ds:datastoreItem xmlns:ds="http://schemas.openxmlformats.org/officeDocument/2006/customXml" ds:itemID="{6A361497-CA1D-44D9-84AF-58C56168E459}">
+  <ds:schemaRefs>
+    <ds:schemaRef ds:uri="http://schemas.microsoft.com/sharepoint/v3/contenttype/forms"/>
+  </ds:schemaRefs>
+</ds:datastoreItem>
+</file>
+
+<file path=customXml/itemProps2.xml><?xml version="1.0" encoding="utf-8"?>
 <ds:datastoreItem xmlns:ds="http://schemas.openxmlformats.org/officeDocument/2006/customXml" ds:itemID="{6F0EB8B3-5775-4D0A-BCCF-6327A205EF30}">
   <ds:schemaRefs>
     <ds:schemaRef ds:uri="http://schemas.openxmlformats.org/package/2006/metadata/core-properties"/>
@@ -5011,14 +5964,6 @@
     <ds:schemaRef ds:uri="http://schemas.microsoft.com/office/infopath/2007/PartnerControls"/>
     <ds:schemaRef ds:uri="1f4001e7-082c-414c-8403-86384946270a"/>
     <ds:schemaRef ds:uri="http://purl.org/dc/terms/"/>
-  </ds:schemaRefs>
-</ds:datastoreItem>
-</file>
-
-<file path=customXml/itemProps2.xml><?xml version="1.0" encoding="utf-8"?>
-<ds:datastoreItem xmlns:ds="http://schemas.openxmlformats.org/officeDocument/2006/customXml" ds:itemID="{6A361497-CA1D-44D9-84AF-58C56168E459}">
-  <ds:schemaRefs>
-    <ds:schemaRef ds:uri="http://schemas.microsoft.com/sharepoint/v3/contenttype/forms"/>
   </ds:schemaRefs>
 </ds:datastoreItem>
 </file>
